--- a/assets/pptx/catalog-509.pptx
+++ b/assets/pptx/catalog-509.pptx
@@ -3432,7 +3432,7 @@
                 <a:ea typeface="Ebrima"/>
                 <a:cs typeface="Ebrima"/>
               </a:rPr>
-              <a:t>ምድር /አገር/ ሁሉ አይሸበር (2x)</a:t>
+              <a:t>ምድር /አገር/ ሁሉ አይሸበር 2x</a:t>
             </a:r>
           </a:p>
         </p:txBody>
@@ -3517,7 +3517,7 @@
                 <a:ea typeface="Ebrima"/>
                 <a:cs typeface="Ebrima"/>
               </a:rPr>
-              <a:t>ይብሱን ኃይለኛ ኃይለኛ አደረገኝ (2x)</a:t>
+              <a:t>ይብሱን ኃይለኛ ኃይለኛ አደረገኝ 2x</a:t>
             </a:r>
           </a:p>
         </p:txBody>
@@ -3911,7 +3911,7 @@
                 <a:ea typeface="Ebrima"/>
                 <a:cs typeface="Ebrima"/>
               </a:rPr>
-              <a:t>ያየሁትን አየዋለሁ አንድም አይቀር (2x)</a:t>
+              <a:t>ያየሁትን አየዋለሁ አንድም አይቀር 2x</a:t>
             </a:r>
           </a:p>
         </p:txBody>
@@ -4153,7 +4153,7 @@
                 <a:ea typeface="Ebrima"/>
                 <a:cs typeface="Ebrima"/>
               </a:rPr>
-              <a:t>ሰባብሬው ልለፍ ኦሆሆ አሃሃ (2x)</a:t>
+              <a:t>ሰባብሬው ልለፍ ኦሆሆ አሃሃ 2x</a:t>
             </a:r>
           </a:p>
         </p:txBody>
@@ -4256,7 +4256,7 @@
                 <a:ea typeface="Ebrima"/>
                 <a:cs typeface="Ebrima"/>
               </a:rPr>
-              <a:t>ወደ እርሱ እሮጣለሁ አሃ ከፍ ከፍ እላለሁ ኦሆሆ (2x)</a:t>
+              <a:t>ወደ እርሱ እሮጣለሁ አሃ ከፍ ከፍ እላለሁ ኦሆሆ 2x</a:t>
             </a:r>
           </a:p>
         </p:txBody>
@@ -4583,7 +4583,7 @@
                 <a:ea typeface="Ebrima"/>
                 <a:cs typeface="Ebrima"/>
               </a:rPr>
-              <a:t>ያየሁትን አየዋለሁ አንድም አይቀር (2x)</a:t>
+              <a:t>ያየሁትን አየዋለሁ አንድም አይቀር 2x</a:t>
             </a:r>
           </a:p>
         </p:txBody>
@@ -4946,7 +4946,7 @@
                 <a:ea typeface="Ebrima"/>
                 <a:cs typeface="Ebrima"/>
               </a:rPr>
-              <a:t>ሳይነኩት ይሸሻል (2x)</a:t>
+              <a:t>ሳይነኩት ይሸሻል 2x</a:t>
             </a:r>
           </a:p>
         </p:txBody>
